--- a/常常喜樂(崇拜版).pptx
+++ b/常常喜樂(崇拜版).pptx
@@ -170,10 +170,9 @@
           <a:lstStyle/>
           <a:p>
             <a:r>
-              <a:rPr lang="zh-TW" altLang="en-US" smtClean="0"/>
+              <a:rPr lang="zh-TW" altLang="en-US"/>
               <a:t>按一下以編輯母片標題樣式</a:t>
             </a:r>
-            <a:endParaRPr lang="zh-TW" altLang="en-US"/>
           </a:p>
         </p:txBody>
       </p:sp>
@@ -289,10 +288,9 @@
           </a:lstStyle>
           <a:p>
             <a:r>
-              <a:rPr lang="zh-TW" altLang="en-US" smtClean="0"/>
+              <a:rPr lang="zh-TW" altLang="en-US"/>
               <a:t>按一下以編輯母片副標題樣式</a:t>
             </a:r>
-            <a:endParaRPr lang="zh-TW" altLang="en-US"/>
           </a:p>
         </p:txBody>
       </p:sp>
@@ -313,7 +311,7 @@
           <a:p>
             <a:fld id="{6C7DCCF5-D9E2-40F3-84B3-3ED2D5DF8D8C}" type="datetimeFigureOut">
               <a:rPr lang="zh-TW" altLang="en-US" smtClean="0"/>
-              <a:t>2023/7/29</a:t>
+              <a:t>2024/4/25</a:t>
             </a:fld>
             <a:endParaRPr lang="zh-TW" altLang="en-US"/>
           </a:p>
@@ -402,10 +400,9 @@
           <a:lstStyle/>
           <a:p>
             <a:r>
-              <a:rPr lang="zh-TW" altLang="en-US" smtClean="0"/>
+              <a:rPr lang="zh-TW" altLang="en-US"/>
               <a:t>按一下以編輯母片標題樣式</a:t>
             </a:r>
-            <a:endParaRPr lang="zh-TW" altLang="en-US"/>
           </a:p>
         </p:txBody>
       </p:sp>
@@ -426,38 +423,37 @@
           <a:p>
             <a:pPr lvl="0"/>
             <a:r>
-              <a:rPr lang="zh-TW" altLang="en-US" smtClean="0"/>
+              <a:rPr lang="zh-TW" altLang="en-US"/>
               <a:t>按一下以編輯母片文字樣式</a:t>
             </a:r>
           </a:p>
           <a:p>
             <a:pPr lvl="1"/>
             <a:r>
-              <a:rPr lang="zh-TW" altLang="en-US" smtClean="0"/>
+              <a:rPr lang="zh-TW" altLang="en-US"/>
               <a:t>第二層</a:t>
             </a:r>
           </a:p>
           <a:p>
             <a:pPr lvl="2"/>
             <a:r>
-              <a:rPr lang="zh-TW" altLang="en-US" smtClean="0"/>
+              <a:rPr lang="zh-TW" altLang="en-US"/>
               <a:t>第三層</a:t>
             </a:r>
           </a:p>
           <a:p>
             <a:pPr lvl="3"/>
             <a:r>
-              <a:rPr lang="zh-TW" altLang="en-US" smtClean="0"/>
+              <a:rPr lang="zh-TW" altLang="en-US"/>
               <a:t>第四層</a:t>
             </a:r>
           </a:p>
           <a:p>
             <a:pPr lvl="4"/>
             <a:r>
-              <a:rPr lang="zh-TW" altLang="en-US" smtClean="0"/>
+              <a:rPr lang="zh-TW" altLang="en-US"/>
               <a:t>第五層</a:t>
             </a:r>
-            <a:endParaRPr lang="zh-TW" altLang="en-US"/>
           </a:p>
         </p:txBody>
       </p:sp>
@@ -478,7 +474,7 @@
           <a:p>
             <a:fld id="{6C7DCCF5-D9E2-40F3-84B3-3ED2D5DF8D8C}" type="datetimeFigureOut">
               <a:rPr lang="zh-TW" altLang="en-US" smtClean="0"/>
-              <a:t>2023/7/29</a:t>
+              <a:t>2024/4/25</a:t>
             </a:fld>
             <a:endParaRPr lang="zh-TW" altLang="en-US"/>
           </a:p>
@@ -572,10 +568,9 @@
           <a:lstStyle/>
           <a:p>
             <a:r>
-              <a:rPr lang="zh-TW" altLang="en-US" smtClean="0"/>
+              <a:rPr lang="zh-TW" altLang="en-US"/>
               <a:t>按一下以編輯母片標題樣式</a:t>
             </a:r>
-            <a:endParaRPr lang="zh-TW" altLang="en-US"/>
           </a:p>
         </p:txBody>
       </p:sp>
@@ -601,38 +596,37 @@
           <a:p>
             <a:pPr lvl="0"/>
             <a:r>
-              <a:rPr lang="zh-TW" altLang="en-US" smtClean="0"/>
+              <a:rPr lang="zh-TW" altLang="en-US"/>
               <a:t>按一下以編輯母片文字樣式</a:t>
             </a:r>
           </a:p>
           <a:p>
             <a:pPr lvl="1"/>
             <a:r>
-              <a:rPr lang="zh-TW" altLang="en-US" smtClean="0"/>
+              <a:rPr lang="zh-TW" altLang="en-US"/>
               <a:t>第二層</a:t>
             </a:r>
           </a:p>
           <a:p>
             <a:pPr lvl="2"/>
             <a:r>
-              <a:rPr lang="zh-TW" altLang="en-US" smtClean="0"/>
+              <a:rPr lang="zh-TW" altLang="en-US"/>
               <a:t>第三層</a:t>
             </a:r>
           </a:p>
           <a:p>
             <a:pPr lvl="3"/>
             <a:r>
-              <a:rPr lang="zh-TW" altLang="en-US" smtClean="0"/>
+              <a:rPr lang="zh-TW" altLang="en-US"/>
               <a:t>第四層</a:t>
             </a:r>
           </a:p>
           <a:p>
             <a:pPr lvl="4"/>
             <a:r>
-              <a:rPr lang="zh-TW" altLang="en-US" smtClean="0"/>
+              <a:rPr lang="zh-TW" altLang="en-US"/>
               <a:t>第五層</a:t>
             </a:r>
-            <a:endParaRPr lang="zh-TW" altLang="en-US"/>
           </a:p>
         </p:txBody>
       </p:sp>
@@ -653,7 +647,7 @@
           <a:p>
             <a:fld id="{6C7DCCF5-D9E2-40F3-84B3-3ED2D5DF8D8C}" type="datetimeFigureOut">
               <a:rPr lang="zh-TW" altLang="en-US" smtClean="0"/>
-              <a:t>2023/7/29</a:t>
+              <a:t>2024/4/25</a:t>
             </a:fld>
             <a:endParaRPr lang="zh-TW" altLang="en-US"/>
           </a:p>
@@ -742,10 +736,9 @@
           <a:lstStyle/>
           <a:p>
             <a:r>
-              <a:rPr lang="zh-TW" altLang="en-US" smtClean="0"/>
+              <a:rPr lang="zh-TW" altLang="en-US"/>
               <a:t>按一下以編輯母片標題樣式</a:t>
             </a:r>
-            <a:endParaRPr lang="zh-TW" altLang="en-US"/>
           </a:p>
         </p:txBody>
       </p:sp>
@@ -766,38 +759,37 @@
           <a:p>
             <a:pPr lvl="0"/>
             <a:r>
-              <a:rPr lang="zh-TW" altLang="en-US" smtClean="0"/>
+              <a:rPr lang="zh-TW" altLang="en-US"/>
               <a:t>按一下以編輯母片文字樣式</a:t>
             </a:r>
           </a:p>
           <a:p>
             <a:pPr lvl="1"/>
             <a:r>
-              <a:rPr lang="zh-TW" altLang="en-US" smtClean="0"/>
+              <a:rPr lang="zh-TW" altLang="en-US"/>
               <a:t>第二層</a:t>
             </a:r>
           </a:p>
           <a:p>
             <a:pPr lvl="2"/>
             <a:r>
-              <a:rPr lang="zh-TW" altLang="en-US" smtClean="0"/>
+              <a:rPr lang="zh-TW" altLang="en-US"/>
               <a:t>第三層</a:t>
             </a:r>
           </a:p>
           <a:p>
             <a:pPr lvl="3"/>
             <a:r>
-              <a:rPr lang="zh-TW" altLang="en-US" smtClean="0"/>
+              <a:rPr lang="zh-TW" altLang="en-US"/>
               <a:t>第四層</a:t>
             </a:r>
           </a:p>
           <a:p>
             <a:pPr lvl="4"/>
             <a:r>
-              <a:rPr lang="zh-TW" altLang="en-US" smtClean="0"/>
+              <a:rPr lang="zh-TW" altLang="en-US"/>
               <a:t>第五層</a:t>
             </a:r>
-            <a:endParaRPr lang="zh-TW" altLang="en-US"/>
           </a:p>
         </p:txBody>
       </p:sp>
@@ -818,7 +810,7 @@
           <a:p>
             <a:fld id="{6C7DCCF5-D9E2-40F3-84B3-3ED2D5DF8D8C}" type="datetimeFigureOut">
               <a:rPr lang="zh-TW" altLang="en-US" smtClean="0"/>
-              <a:t>2023/7/29</a:t>
+              <a:t>2024/4/25</a:t>
             </a:fld>
             <a:endParaRPr lang="zh-TW" altLang="en-US"/>
           </a:p>
@@ -916,10 +908,9 @@
           </a:lstStyle>
           <a:p>
             <a:r>
-              <a:rPr lang="zh-TW" altLang="en-US" smtClean="0"/>
+              <a:rPr lang="zh-TW" altLang="en-US"/>
               <a:t>按一下以編輯母片標題樣式</a:t>
             </a:r>
-            <a:endParaRPr lang="zh-TW" altLang="en-US"/>
           </a:p>
         </p:txBody>
       </p:sp>
@@ -1036,7 +1027,7 @@
           <a:p>
             <a:pPr lvl="0"/>
             <a:r>
-              <a:rPr lang="zh-TW" altLang="en-US" smtClean="0"/>
+              <a:rPr lang="zh-TW" altLang="en-US"/>
               <a:t>按一下以編輯母片文字樣式</a:t>
             </a:r>
           </a:p>
@@ -1059,7 +1050,7 @@
           <a:p>
             <a:fld id="{6C7DCCF5-D9E2-40F3-84B3-3ED2D5DF8D8C}" type="datetimeFigureOut">
               <a:rPr lang="zh-TW" altLang="en-US" smtClean="0"/>
-              <a:t>2023/7/29</a:t>
+              <a:t>2024/4/25</a:t>
             </a:fld>
             <a:endParaRPr lang="zh-TW" altLang="en-US"/>
           </a:p>
@@ -1148,10 +1139,9 @@
           <a:lstStyle/>
           <a:p>
             <a:r>
-              <a:rPr lang="zh-TW" altLang="en-US" smtClean="0"/>
+              <a:rPr lang="zh-TW" altLang="en-US"/>
               <a:t>按一下以編輯母片標題樣式</a:t>
             </a:r>
-            <a:endParaRPr lang="zh-TW" altLang="en-US"/>
           </a:p>
         </p:txBody>
       </p:sp>
@@ -1205,38 +1195,37 @@
           <a:p>
             <a:pPr lvl="0"/>
             <a:r>
-              <a:rPr lang="zh-TW" altLang="en-US" smtClean="0"/>
+              <a:rPr lang="zh-TW" altLang="en-US"/>
               <a:t>按一下以編輯母片文字樣式</a:t>
             </a:r>
           </a:p>
           <a:p>
             <a:pPr lvl="1"/>
             <a:r>
-              <a:rPr lang="zh-TW" altLang="en-US" smtClean="0"/>
+              <a:rPr lang="zh-TW" altLang="en-US"/>
               <a:t>第二層</a:t>
             </a:r>
           </a:p>
           <a:p>
             <a:pPr lvl="2"/>
             <a:r>
-              <a:rPr lang="zh-TW" altLang="en-US" smtClean="0"/>
+              <a:rPr lang="zh-TW" altLang="en-US"/>
               <a:t>第三層</a:t>
             </a:r>
           </a:p>
           <a:p>
             <a:pPr lvl="3"/>
             <a:r>
-              <a:rPr lang="zh-TW" altLang="en-US" smtClean="0"/>
+              <a:rPr lang="zh-TW" altLang="en-US"/>
               <a:t>第四層</a:t>
             </a:r>
           </a:p>
           <a:p>
             <a:pPr lvl="4"/>
             <a:r>
-              <a:rPr lang="zh-TW" altLang="en-US" smtClean="0"/>
+              <a:rPr lang="zh-TW" altLang="en-US"/>
               <a:t>第五層</a:t>
             </a:r>
-            <a:endParaRPr lang="zh-TW" altLang="en-US"/>
           </a:p>
         </p:txBody>
       </p:sp>
@@ -1290,38 +1279,37 @@
           <a:p>
             <a:pPr lvl="0"/>
             <a:r>
-              <a:rPr lang="zh-TW" altLang="en-US" smtClean="0"/>
+              <a:rPr lang="zh-TW" altLang="en-US"/>
               <a:t>按一下以編輯母片文字樣式</a:t>
             </a:r>
           </a:p>
           <a:p>
             <a:pPr lvl="1"/>
             <a:r>
-              <a:rPr lang="zh-TW" altLang="en-US" smtClean="0"/>
+              <a:rPr lang="zh-TW" altLang="en-US"/>
               <a:t>第二層</a:t>
             </a:r>
           </a:p>
           <a:p>
             <a:pPr lvl="2"/>
             <a:r>
-              <a:rPr lang="zh-TW" altLang="en-US" smtClean="0"/>
+              <a:rPr lang="zh-TW" altLang="en-US"/>
               <a:t>第三層</a:t>
             </a:r>
           </a:p>
           <a:p>
             <a:pPr lvl="3"/>
             <a:r>
-              <a:rPr lang="zh-TW" altLang="en-US" smtClean="0"/>
+              <a:rPr lang="zh-TW" altLang="en-US"/>
               <a:t>第四層</a:t>
             </a:r>
           </a:p>
           <a:p>
             <a:pPr lvl="4"/>
             <a:r>
-              <a:rPr lang="zh-TW" altLang="en-US" smtClean="0"/>
+              <a:rPr lang="zh-TW" altLang="en-US"/>
               <a:t>第五層</a:t>
             </a:r>
-            <a:endParaRPr lang="zh-TW" altLang="en-US"/>
           </a:p>
         </p:txBody>
       </p:sp>
@@ -1342,7 +1330,7 @@
           <a:p>
             <a:fld id="{6C7DCCF5-D9E2-40F3-84B3-3ED2D5DF8D8C}" type="datetimeFigureOut">
               <a:rPr lang="zh-TW" altLang="en-US" smtClean="0"/>
-              <a:t>2023/7/29</a:t>
+              <a:t>2024/4/25</a:t>
             </a:fld>
             <a:endParaRPr lang="zh-TW" altLang="en-US"/>
           </a:p>
@@ -1435,10 +1423,9 @@
           </a:lstStyle>
           <a:p>
             <a:r>
-              <a:rPr lang="zh-TW" altLang="en-US" smtClean="0"/>
+              <a:rPr lang="zh-TW" altLang="en-US"/>
               <a:t>按一下以編輯母片標題樣式</a:t>
             </a:r>
-            <a:endParaRPr lang="zh-TW" altLang="en-US"/>
           </a:p>
         </p:txBody>
       </p:sp>
@@ -1501,7 +1488,7 @@
           <a:p>
             <a:pPr lvl="0"/>
             <a:r>
-              <a:rPr lang="zh-TW" altLang="en-US" smtClean="0"/>
+              <a:rPr lang="zh-TW" altLang="en-US"/>
               <a:t>按一下以編輯母片文字樣式</a:t>
             </a:r>
           </a:p>
@@ -1557,38 +1544,37 @@
           <a:p>
             <a:pPr lvl="0"/>
             <a:r>
-              <a:rPr lang="zh-TW" altLang="en-US" smtClean="0"/>
+              <a:rPr lang="zh-TW" altLang="en-US"/>
               <a:t>按一下以編輯母片文字樣式</a:t>
             </a:r>
           </a:p>
           <a:p>
             <a:pPr lvl="1"/>
             <a:r>
-              <a:rPr lang="zh-TW" altLang="en-US" smtClean="0"/>
+              <a:rPr lang="zh-TW" altLang="en-US"/>
               <a:t>第二層</a:t>
             </a:r>
           </a:p>
           <a:p>
             <a:pPr lvl="2"/>
             <a:r>
-              <a:rPr lang="zh-TW" altLang="en-US" smtClean="0"/>
+              <a:rPr lang="zh-TW" altLang="en-US"/>
               <a:t>第三層</a:t>
             </a:r>
           </a:p>
           <a:p>
             <a:pPr lvl="3"/>
             <a:r>
-              <a:rPr lang="zh-TW" altLang="en-US" smtClean="0"/>
+              <a:rPr lang="zh-TW" altLang="en-US"/>
               <a:t>第四層</a:t>
             </a:r>
           </a:p>
           <a:p>
             <a:pPr lvl="4"/>
             <a:r>
-              <a:rPr lang="zh-TW" altLang="en-US" smtClean="0"/>
+              <a:rPr lang="zh-TW" altLang="en-US"/>
               <a:t>第五層</a:t>
             </a:r>
-            <a:endParaRPr lang="zh-TW" altLang="en-US"/>
           </a:p>
         </p:txBody>
       </p:sp>
@@ -1651,7 +1637,7 @@
           <a:p>
             <a:pPr lvl="0"/>
             <a:r>
-              <a:rPr lang="zh-TW" altLang="en-US" smtClean="0"/>
+              <a:rPr lang="zh-TW" altLang="en-US"/>
               <a:t>按一下以編輯母片文字樣式</a:t>
             </a:r>
           </a:p>
@@ -1707,38 +1693,37 @@
           <a:p>
             <a:pPr lvl="0"/>
             <a:r>
-              <a:rPr lang="zh-TW" altLang="en-US" smtClean="0"/>
+              <a:rPr lang="zh-TW" altLang="en-US"/>
               <a:t>按一下以編輯母片文字樣式</a:t>
             </a:r>
           </a:p>
           <a:p>
             <a:pPr lvl="1"/>
             <a:r>
-              <a:rPr lang="zh-TW" altLang="en-US" smtClean="0"/>
+              <a:rPr lang="zh-TW" altLang="en-US"/>
               <a:t>第二層</a:t>
             </a:r>
           </a:p>
           <a:p>
             <a:pPr lvl="2"/>
             <a:r>
-              <a:rPr lang="zh-TW" altLang="en-US" smtClean="0"/>
+              <a:rPr lang="zh-TW" altLang="en-US"/>
               <a:t>第三層</a:t>
             </a:r>
           </a:p>
           <a:p>
             <a:pPr lvl="3"/>
             <a:r>
-              <a:rPr lang="zh-TW" altLang="en-US" smtClean="0"/>
+              <a:rPr lang="zh-TW" altLang="en-US"/>
               <a:t>第四層</a:t>
             </a:r>
           </a:p>
           <a:p>
             <a:pPr lvl="4"/>
             <a:r>
-              <a:rPr lang="zh-TW" altLang="en-US" smtClean="0"/>
+              <a:rPr lang="zh-TW" altLang="en-US"/>
               <a:t>第五層</a:t>
             </a:r>
-            <a:endParaRPr lang="zh-TW" altLang="en-US"/>
           </a:p>
         </p:txBody>
       </p:sp>
@@ -1759,7 +1744,7 @@
           <a:p>
             <a:fld id="{6C7DCCF5-D9E2-40F3-84B3-3ED2D5DF8D8C}" type="datetimeFigureOut">
               <a:rPr lang="zh-TW" altLang="en-US" smtClean="0"/>
-              <a:t>2023/7/29</a:t>
+              <a:t>2024/4/25</a:t>
             </a:fld>
             <a:endParaRPr lang="zh-TW" altLang="en-US"/>
           </a:p>
@@ -1848,10 +1833,9 @@
           <a:lstStyle/>
           <a:p>
             <a:r>
-              <a:rPr lang="zh-TW" altLang="en-US" smtClean="0"/>
+              <a:rPr lang="zh-TW" altLang="en-US"/>
               <a:t>按一下以編輯母片標題樣式</a:t>
             </a:r>
-            <a:endParaRPr lang="zh-TW" altLang="en-US"/>
           </a:p>
         </p:txBody>
       </p:sp>
@@ -1872,7 +1856,7 @@
           <a:p>
             <a:fld id="{6C7DCCF5-D9E2-40F3-84B3-3ED2D5DF8D8C}" type="datetimeFigureOut">
               <a:rPr lang="zh-TW" altLang="en-US" smtClean="0"/>
-              <a:t>2023/7/29</a:t>
+              <a:t>2024/4/25</a:t>
             </a:fld>
             <a:endParaRPr lang="zh-TW" altLang="en-US"/>
           </a:p>
@@ -1962,7 +1946,7 @@
           <a:p>
             <a:fld id="{6C7DCCF5-D9E2-40F3-84B3-3ED2D5DF8D8C}" type="datetimeFigureOut">
               <a:rPr lang="zh-TW" altLang="en-US" smtClean="0"/>
-              <a:t>2023/7/29</a:t>
+              <a:t>2024/4/25</a:t>
             </a:fld>
             <a:endParaRPr lang="zh-TW" altLang="en-US"/>
           </a:p>
@@ -2060,10 +2044,9 @@
           </a:lstStyle>
           <a:p>
             <a:r>
-              <a:rPr lang="zh-TW" altLang="en-US" smtClean="0"/>
+              <a:rPr lang="zh-TW" altLang="en-US"/>
               <a:t>按一下以編輯母片標題樣式</a:t>
             </a:r>
-            <a:endParaRPr lang="zh-TW" altLang="en-US"/>
           </a:p>
         </p:txBody>
       </p:sp>
@@ -2117,38 +2100,37 @@
           <a:p>
             <a:pPr lvl="0"/>
             <a:r>
-              <a:rPr lang="zh-TW" altLang="en-US" smtClean="0"/>
+              <a:rPr lang="zh-TW" altLang="en-US"/>
               <a:t>按一下以編輯母片文字樣式</a:t>
             </a:r>
           </a:p>
           <a:p>
             <a:pPr lvl="1"/>
             <a:r>
-              <a:rPr lang="zh-TW" altLang="en-US" smtClean="0"/>
+              <a:rPr lang="zh-TW" altLang="en-US"/>
               <a:t>第二層</a:t>
             </a:r>
           </a:p>
           <a:p>
             <a:pPr lvl="2"/>
             <a:r>
-              <a:rPr lang="zh-TW" altLang="en-US" smtClean="0"/>
+              <a:rPr lang="zh-TW" altLang="en-US"/>
               <a:t>第三層</a:t>
             </a:r>
           </a:p>
           <a:p>
             <a:pPr lvl="3"/>
             <a:r>
-              <a:rPr lang="zh-TW" altLang="en-US" smtClean="0"/>
+              <a:rPr lang="zh-TW" altLang="en-US"/>
               <a:t>第四層</a:t>
             </a:r>
           </a:p>
           <a:p>
             <a:pPr lvl="4"/>
             <a:r>
-              <a:rPr lang="zh-TW" altLang="en-US" smtClean="0"/>
+              <a:rPr lang="zh-TW" altLang="en-US"/>
               <a:t>第五層</a:t>
             </a:r>
-            <a:endParaRPr lang="zh-TW" altLang="en-US"/>
           </a:p>
         </p:txBody>
       </p:sp>
@@ -2211,7 +2193,7 @@
           <a:p>
             <a:pPr lvl="0"/>
             <a:r>
-              <a:rPr lang="zh-TW" altLang="en-US" smtClean="0"/>
+              <a:rPr lang="zh-TW" altLang="en-US"/>
               <a:t>按一下以編輯母片文字樣式</a:t>
             </a:r>
           </a:p>
@@ -2234,7 +2216,7 @@
           <a:p>
             <a:fld id="{6C7DCCF5-D9E2-40F3-84B3-3ED2D5DF8D8C}" type="datetimeFigureOut">
               <a:rPr lang="zh-TW" altLang="en-US" smtClean="0"/>
-              <a:t>2023/7/29</a:t>
+              <a:t>2024/4/25</a:t>
             </a:fld>
             <a:endParaRPr lang="zh-TW" altLang="en-US"/>
           </a:p>
@@ -2332,10 +2314,9 @@
           </a:lstStyle>
           <a:p>
             <a:r>
-              <a:rPr lang="zh-TW" altLang="en-US" smtClean="0"/>
+              <a:rPr lang="zh-TW" altLang="en-US"/>
               <a:t>按一下以編輯母片標題樣式</a:t>
             </a:r>
-            <a:endParaRPr lang="zh-TW" altLang="en-US"/>
           </a:p>
         </p:txBody>
       </p:sp>
@@ -2397,10 +2378,9 @@
           </a:lstStyle>
           <a:p>
             <a:r>
-              <a:rPr lang="zh-TW" altLang="en-US" smtClean="0"/>
+              <a:rPr lang="zh-TW" altLang="en-US"/>
               <a:t>按一下圖示以新增圖片</a:t>
             </a:r>
-            <a:endParaRPr lang="zh-TW" altLang="en-US"/>
           </a:p>
         </p:txBody>
       </p:sp>
@@ -2463,7 +2443,7 @@
           <a:p>
             <a:pPr lvl="0"/>
             <a:r>
-              <a:rPr lang="zh-TW" altLang="en-US" smtClean="0"/>
+              <a:rPr lang="zh-TW" altLang="en-US"/>
               <a:t>按一下以編輯母片文字樣式</a:t>
             </a:r>
           </a:p>
@@ -2486,7 +2466,7 @@
           <a:p>
             <a:fld id="{6C7DCCF5-D9E2-40F3-84B3-3ED2D5DF8D8C}" type="datetimeFigureOut">
               <a:rPr lang="zh-TW" altLang="en-US" smtClean="0"/>
-              <a:t>2023/7/29</a:t>
+              <a:t>2024/4/25</a:t>
             </a:fld>
             <a:endParaRPr lang="zh-TW" altLang="en-US"/>
           </a:p>
@@ -2595,10 +2575,9 @@
           <a:lstStyle/>
           <a:p>
             <a:r>
-              <a:rPr lang="zh-TW" altLang="en-US" smtClean="0"/>
+              <a:rPr lang="zh-TW" altLang="en-US"/>
               <a:t>按一下以編輯母片標題樣式</a:t>
             </a:r>
-            <a:endParaRPr lang="zh-TW" altLang="en-US"/>
           </a:p>
         </p:txBody>
       </p:sp>
@@ -2629,38 +2608,37 @@
           <a:p>
             <a:pPr lvl="0"/>
             <a:r>
-              <a:rPr lang="zh-TW" altLang="en-US" smtClean="0"/>
+              <a:rPr lang="zh-TW" altLang="en-US"/>
               <a:t>按一下以編輯母片文字樣式</a:t>
             </a:r>
           </a:p>
           <a:p>
             <a:pPr lvl="1"/>
             <a:r>
-              <a:rPr lang="zh-TW" altLang="en-US" smtClean="0"/>
+              <a:rPr lang="zh-TW" altLang="en-US"/>
               <a:t>第二層</a:t>
             </a:r>
           </a:p>
           <a:p>
             <a:pPr lvl="2"/>
             <a:r>
-              <a:rPr lang="zh-TW" altLang="en-US" smtClean="0"/>
+              <a:rPr lang="zh-TW" altLang="en-US"/>
               <a:t>第三層</a:t>
             </a:r>
           </a:p>
           <a:p>
             <a:pPr lvl="3"/>
             <a:r>
-              <a:rPr lang="zh-TW" altLang="en-US" smtClean="0"/>
+              <a:rPr lang="zh-TW" altLang="en-US"/>
               <a:t>第四層</a:t>
             </a:r>
           </a:p>
           <a:p>
             <a:pPr lvl="4"/>
             <a:r>
-              <a:rPr lang="zh-TW" altLang="en-US" smtClean="0"/>
+              <a:rPr lang="zh-TW" altLang="en-US"/>
               <a:t>第五層</a:t>
             </a:r>
-            <a:endParaRPr lang="zh-TW" altLang="en-US"/>
           </a:p>
         </p:txBody>
       </p:sp>
@@ -2699,7 +2677,7 @@
           <a:p>
             <a:fld id="{6C7DCCF5-D9E2-40F3-84B3-3ED2D5DF8D8C}" type="datetimeFigureOut">
               <a:rPr lang="zh-TW" altLang="en-US" smtClean="0"/>
-              <a:t>2023/7/29</a:t>
+              <a:t>2024/4/25</a:t>
             </a:fld>
             <a:endParaRPr lang="zh-TW" altLang="en-US"/>
           </a:p>
@@ -3106,24 +3084,7 @@
                 <a:latin typeface="微軟正黑體" pitchFamily="34" charset="-120"/>
                 <a:ea typeface="微軟正黑體" pitchFamily="34" charset="-120"/>
               </a:rPr>
-              <a:t>常</a:t>
-            </a:r>
-            <a:r>
-              <a:rPr lang="zh-CN" altLang="en-US" sz="7200" b="1" i="1" dirty="0">
-                <a:solidFill>
-                  <a:srgbClr val="000066"/>
-                </a:solidFill>
-                <a:effectLst>
-                  <a:outerShdw blurRad="38100" dist="38100" dir="2700000" algn="tl">
-                    <a:srgbClr val="000000">
-                      <a:alpha val="43137"/>
-                    </a:srgbClr>
-                  </a:outerShdw>
-                </a:effectLst>
-                <a:latin typeface="微軟正黑體" pitchFamily="34" charset="-120"/>
-                <a:ea typeface="微軟正黑體" pitchFamily="34" charset="-120"/>
-              </a:rPr>
-              <a:t>常喜樂</a:t>
+              <a:t>常常喜樂</a:t>
             </a:r>
             <a:endParaRPr lang="zh-TW" altLang="en-US" sz="7200" b="1" i="1" dirty="0">
               <a:solidFill>
@@ -3280,7 +3241,7 @@
                 <a:latin typeface="Microsoft JhengHei" panose="020B0604030504040204" pitchFamily="34" charset="-120"/>
                 <a:ea typeface="Microsoft JhengHei" panose="020B0604030504040204" pitchFamily="34" charset="-120"/>
               </a:rPr>
-              <a:t>副</a:t>
+              <a:t>副歌</a:t>
             </a:r>
             <a:r>
               <a:rPr lang="en-US" sz="3733" b="1" dirty="0">
@@ -3439,7 +3400,7 @@
                 <a:latin typeface="Microsoft JhengHei" panose="020B0604030504040204" pitchFamily="34" charset="-120"/>
                 <a:ea typeface="Microsoft JhengHei" panose="020B0604030504040204" pitchFamily="34" charset="-120"/>
               </a:rPr>
-              <a:t>正</a:t>
+              <a:t>正歌</a:t>
             </a:r>
             <a:r>
               <a:rPr lang="en-US" sz="3733" b="1" dirty="0">
@@ -3598,7 +3559,7 @@
                 <a:latin typeface="Microsoft JhengHei" panose="020B0604030504040204" pitchFamily="34" charset="-120"/>
                 <a:ea typeface="Microsoft JhengHei" panose="020B0604030504040204" pitchFamily="34" charset="-120"/>
               </a:rPr>
-              <a:t>正</a:t>
+              <a:t>正歌 </a:t>
             </a:r>
             <a:r>
               <a:rPr lang="en-US" sz="3733" b="1" dirty="0">
@@ -3608,7 +3569,7 @@
                 <a:latin typeface="Microsoft JhengHei" panose="020B0604030504040204" pitchFamily="34" charset="-120"/>
                 <a:ea typeface="Microsoft JhengHei" panose="020B0604030504040204" pitchFamily="34" charset="-120"/>
               </a:rPr>
-              <a:t> )</a:t>
+              <a:t>)</a:t>
             </a:r>
             <a:endParaRPr lang="vi-VN" sz="3733" b="1" dirty="0">
               <a:solidFill>
@@ -3757,7 +3718,7 @@
                 <a:latin typeface="Microsoft JhengHei" panose="020B0604030504040204" pitchFamily="34" charset="-120"/>
                 <a:ea typeface="Microsoft JhengHei" panose="020B0604030504040204" pitchFamily="34" charset="-120"/>
               </a:rPr>
-              <a:t>正</a:t>
+              <a:t>正歌 </a:t>
             </a:r>
             <a:r>
               <a:rPr lang="en-US" sz="3733" b="1" dirty="0">
@@ -3767,7 +3728,7 @@
                 <a:latin typeface="Microsoft JhengHei" panose="020B0604030504040204" pitchFamily="34" charset="-120"/>
                 <a:ea typeface="Microsoft JhengHei" panose="020B0604030504040204" pitchFamily="34" charset="-120"/>
               </a:rPr>
-              <a:t> )</a:t>
+              <a:t>)</a:t>
             </a:r>
             <a:endParaRPr lang="vi-VN" sz="3733" b="1" dirty="0">
               <a:solidFill>
@@ -3916,7 +3877,7 @@
                 <a:latin typeface="Microsoft JhengHei" panose="020B0604030504040204" pitchFamily="34" charset="-120"/>
                 <a:ea typeface="Microsoft JhengHei" panose="020B0604030504040204" pitchFamily="34" charset="-120"/>
               </a:rPr>
-              <a:t>正</a:t>
+              <a:t>正歌 </a:t>
             </a:r>
             <a:r>
               <a:rPr lang="en-US" sz="3733" b="1" dirty="0">
@@ -3926,7 +3887,7 @@
                 <a:latin typeface="Microsoft JhengHei" panose="020B0604030504040204" pitchFamily="34" charset="-120"/>
                 <a:ea typeface="Microsoft JhengHei" panose="020B0604030504040204" pitchFamily="34" charset="-120"/>
               </a:rPr>
-              <a:t> )</a:t>
+              <a:t>)</a:t>
             </a:r>
             <a:endParaRPr lang="vi-VN" sz="3733" b="1" dirty="0">
               <a:solidFill>
@@ -4075,7 +4036,7 @@
                 <a:latin typeface="Microsoft JhengHei" panose="020B0604030504040204" pitchFamily="34" charset="-120"/>
                 <a:ea typeface="Microsoft JhengHei" panose="020B0604030504040204" pitchFamily="34" charset="-120"/>
               </a:rPr>
-              <a:t>副</a:t>
+              <a:t>副歌</a:t>
             </a:r>
             <a:r>
               <a:rPr lang="en-US" sz="3733" b="1" dirty="0">
@@ -4234,7 +4195,7 @@
                 <a:latin typeface="Microsoft JhengHei" panose="020B0604030504040204" pitchFamily="34" charset="-120"/>
                 <a:ea typeface="Microsoft JhengHei" panose="020B0604030504040204" pitchFamily="34" charset="-120"/>
               </a:rPr>
-              <a:t>副</a:t>
+              <a:t>副歌</a:t>
             </a:r>
             <a:r>
               <a:rPr lang="en-US" sz="3733" b="1" dirty="0">
@@ -4393,7 +4354,7 @@
                 <a:latin typeface="Microsoft JhengHei" panose="020B0604030504040204" pitchFamily="34" charset="-120"/>
                 <a:ea typeface="Microsoft JhengHei" panose="020B0604030504040204" pitchFamily="34" charset="-120"/>
               </a:rPr>
-              <a:t>副</a:t>
+              <a:t>副歌</a:t>
             </a:r>
             <a:r>
               <a:rPr lang="en-US" sz="3733" b="1" dirty="0">
@@ -4552,10 +4513,10 @@
                 <a:latin typeface="Microsoft JhengHei" panose="020B0604030504040204" pitchFamily="34" charset="-120"/>
                 <a:ea typeface="Microsoft JhengHei" panose="020B0604030504040204" pitchFamily="34" charset="-120"/>
               </a:rPr>
-              <a:t>副</a:t>
-            </a:r>
-            <a:r>
-              <a:rPr lang="en-US" sz="3733" b="1" dirty="0">
+              <a:t>副歌</a:t>
+            </a:r>
+            <a:r>
+              <a:rPr lang="en-US" sz="3733" b="1">
                 <a:solidFill>
                   <a:srgbClr val="000066"/>
                 </a:solidFill>
